--- a/images/home/home.pptx
+++ b/images/home/home.pptx
@@ -104,6 +104,11 @@
       </a:defRPr>
     </a:lvl9pPr>
   </p:defaultTextStyle>
+  <p:extLst>
+    <p:ext uri="{EFAFB233-063F-42B5-8137-9DF3F51BA10A}">
+      <p15:sldGuideLst xmlns:p15="http://schemas.microsoft.com/office/powerpoint/2012/main"/>
+    </p:ext>
+  </p:extLst>
 </p:presentation>
 </file>
 
@@ -3437,105 +3442,77 @@
           </p:spPr>
         </p:pic>
       </p:grpSp>
-      <p:grpSp>
-        <p:nvGrpSpPr>
-          <p:cNvPr id="9" name="Group 8">
-            <a:extLst>
-              <a:ext uri="{FF2B5EF4-FFF2-40B4-BE49-F238E27FC236}">
-                <a16:creationId xmlns:a16="http://schemas.microsoft.com/office/drawing/2014/main" id="{6C0FCB87-D16D-2349-9F14-F5BDC295EA3B}"/>
-              </a:ext>
-            </a:extLst>
-          </p:cNvPr>
-          <p:cNvGrpSpPr>
-            <a:grpSpLocks noChangeAspect="1"/>
-          </p:cNvGrpSpPr>
+      <p:pic>
+        <p:nvPicPr>
+          <p:cNvPr id="12" name="Picture 11">
+            <a:extLst>
+              <a:ext uri="{FF2B5EF4-FFF2-40B4-BE49-F238E27FC236}">
+                <a16:creationId xmlns:a16="http://schemas.microsoft.com/office/drawing/2014/main" id="{E2A47620-8D0C-814A-A203-293112B28C7F}"/>
+              </a:ext>
+            </a:extLst>
+          </p:cNvPr>
+          <p:cNvPicPr>
+            <a:picLocks noChangeAspect="1"/>
+          </p:cNvPicPr>
           <p:nvPr/>
-        </p:nvGrpSpPr>
-        <p:grpSpPr>
+        </p:nvPicPr>
+        <p:blipFill rotWithShape="1">
+          <a:blip r:embed="rId4" cstate="hqprint">
+            <a:extLst>
+              <a:ext uri="{28A0092B-C50C-407E-A947-70E740481C1C}">
+                <a14:useLocalDpi xmlns:a14="http://schemas.microsoft.com/office/drawing/2010/main"/>
+              </a:ext>
+            </a:extLst>
+          </a:blip>
+          <a:srcRect/>
+          <a:stretch/>
+        </p:blipFill>
+        <p:spPr>
           <a:xfrm>
-            <a:off x="641128" y="1935286"/>
-            <a:ext cx="1993914" cy="1080000"/>
-            <a:chOff x="1333102" y="1987733"/>
-            <a:chExt cx="1667193" cy="903032"/>
+            <a:off x="1842283" y="1935286"/>
+            <a:ext cx="792759" cy="1076374"/>
           </a:xfrm>
-        </p:grpSpPr>
-        <p:pic>
-          <p:nvPicPr>
-            <p:cNvPr id="11" name="Picture 10">
-              <a:extLst>
-                <a:ext uri="{FF2B5EF4-FFF2-40B4-BE49-F238E27FC236}">
-                  <a16:creationId xmlns:a16="http://schemas.microsoft.com/office/drawing/2014/main" id="{9A9BF504-3BA8-0442-BC73-6052018DDF6F}"/>
-                </a:ext>
-              </a:extLst>
-            </p:cNvPr>
-            <p:cNvPicPr>
-              <a:picLocks noChangeAspect="1"/>
-            </p:cNvPicPr>
-            <p:nvPr/>
-          </p:nvPicPr>
-          <p:blipFill rotWithShape="1">
-            <a:blip r:embed="rId4" cstate="hqprint">
-              <a:extLst>
-                <a:ext uri="{28A0092B-C50C-407E-A947-70E740481C1C}">
-                  <a14:useLocalDpi xmlns:a14="http://schemas.microsoft.com/office/drawing/2010/main"/>
-                </a:ext>
-              </a:extLst>
-            </a:blip>
-            <a:srcRect/>
-            <a:stretch/>
-          </p:blipFill>
-          <p:spPr>
-            <a:xfrm>
-              <a:off x="1333102" y="1990765"/>
-              <a:ext cx="901169" cy="900000"/>
-            </a:xfrm>
-            <a:prstGeom prst="ellipse">
-              <a:avLst/>
-            </a:prstGeom>
-          </p:spPr>
-        </p:pic>
-        <p:pic>
-          <p:nvPicPr>
-            <p:cNvPr id="12" name="Picture 11">
-              <a:extLst>
-                <a:ext uri="{FF2B5EF4-FFF2-40B4-BE49-F238E27FC236}">
-                  <a16:creationId xmlns:a16="http://schemas.microsoft.com/office/drawing/2014/main" id="{E2A47620-8D0C-814A-A203-293112B28C7F}"/>
-                </a:ext>
-              </a:extLst>
-            </p:cNvPr>
-            <p:cNvPicPr>
-              <a:picLocks noChangeAspect="1"/>
-            </p:cNvPicPr>
-            <p:nvPr/>
-          </p:nvPicPr>
-          <p:blipFill rotWithShape="1">
-            <a:blip r:embed="rId5" cstate="hqprint">
-              <a:extLst>
-                <a:ext uri="{28A0092B-C50C-407E-A947-70E740481C1C}">
-                  <a14:useLocalDpi xmlns:a14="http://schemas.microsoft.com/office/drawing/2010/main"/>
-                </a:ext>
-              </a:extLst>
-            </a:blip>
-            <a:srcRect/>
-            <a:stretch/>
-          </p:blipFill>
-          <p:spPr>
-            <a:xfrm>
-              <a:off x="2337437" y="1987733"/>
-              <a:ext cx="662858" cy="900000"/>
-            </a:xfrm>
-            <a:prstGeom prst="rect">
-              <a:avLst/>
-            </a:prstGeom>
-          </p:spPr>
-        </p:pic>
-      </p:grpSp>
+          <a:prstGeom prst="rect">
+            <a:avLst/>
+          </a:prstGeom>
+        </p:spPr>
+      </p:pic>
       <p:pic>
         <p:nvPicPr>
           <p:cNvPr id="13" name="Picture 12">
             <a:extLst>
               <a:ext uri="{FF2B5EF4-FFF2-40B4-BE49-F238E27FC236}">
                 <a16:creationId xmlns:a16="http://schemas.microsoft.com/office/drawing/2014/main" id="{F34570CD-CAA2-2C42-8CB4-41A0966F1527}"/>
+              </a:ext>
+            </a:extLst>
+          </p:cNvPr>
+          <p:cNvPicPr>
+            <a:picLocks noChangeAspect="1"/>
+          </p:cNvPicPr>
+          <p:nvPr/>
+        </p:nvPicPr>
+        <p:blipFill>
+          <a:blip r:embed="rId5"/>
+          <a:stretch>
+            <a:fillRect/>
+          </a:stretch>
+        </p:blipFill>
+        <p:spPr>
+          <a:xfrm>
+            <a:off x="769066" y="3747034"/>
+            <a:ext cx="1546666" cy="1440000"/>
+          </a:xfrm>
+          <a:prstGeom prst="rect">
+            <a:avLst/>
+          </a:prstGeom>
+        </p:spPr>
+      </p:pic>
+      <p:pic>
+        <p:nvPicPr>
+          <p:cNvPr id="10" name="Picture 9">
+            <a:extLst>
+              <a:ext uri="{FF2B5EF4-FFF2-40B4-BE49-F238E27FC236}">
+                <a16:creationId xmlns:a16="http://schemas.microsoft.com/office/drawing/2014/main" id="{47D3BC0B-CD1A-2C4D-BD7A-AACA3452C434}"/>
               </a:ext>
             </a:extLst>
           </p:cNvPr>
@@ -3552,8 +3529,8 @@
         </p:blipFill>
         <p:spPr>
           <a:xfrm>
-            <a:off x="769066" y="3747034"/>
-            <a:ext cx="1546666" cy="1440000"/>
+            <a:off x="687532" y="1931660"/>
+            <a:ext cx="1139449" cy="1080000"/>
           </a:xfrm>
           <a:prstGeom prst="rect">
             <a:avLst/>

--- a/images/home/home.pptx
+++ b/images/home/home.pptx
@@ -261,7 +261,7 @@
           <a:p>
             <a:fld id="{984C9F39-1BBA-134C-9DFC-3F78F8A92C10}" type="datetimeFigureOut">
               <a:rPr lang="en-FI" smtClean="0"/>
-              <a:t>22/12/2021</a:t>
+              <a:t>15.12.2023</a:t>
             </a:fld>
             <a:endParaRPr lang="en-FI"/>
           </a:p>
@@ -461,7 +461,7 @@
           <a:p>
             <a:fld id="{984C9F39-1BBA-134C-9DFC-3F78F8A92C10}" type="datetimeFigureOut">
               <a:rPr lang="en-FI" smtClean="0"/>
-              <a:t>22/12/2021</a:t>
+              <a:t>15.12.2023</a:t>
             </a:fld>
             <a:endParaRPr lang="en-FI"/>
           </a:p>
@@ -671,7 +671,7 @@
           <a:p>
             <a:fld id="{984C9F39-1BBA-134C-9DFC-3F78F8A92C10}" type="datetimeFigureOut">
               <a:rPr lang="en-FI" smtClean="0"/>
-              <a:t>22/12/2021</a:t>
+              <a:t>15.12.2023</a:t>
             </a:fld>
             <a:endParaRPr lang="en-FI"/>
           </a:p>
@@ -871,7 +871,7 @@
           <a:p>
             <a:fld id="{984C9F39-1BBA-134C-9DFC-3F78F8A92C10}" type="datetimeFigureOut">
               <a:rPr lang="en-FI" smtClean="0"/>
-              <a:t>22/12/2021</a:t>
+              <a:t>15.12.2023</a:t>
             </a:fld>
             <a:endParaRPr lang="en-FI"/>
           </a:p>
@@ -1147,7 +1147,7 @@
           <a:p>
             <a:fld id="{984C9F39-1BBA-134C-9DFC-3F78F8A92C10}" type="datetimeFigureOut">
               <a:rPr lang="en-FI" smtClean="0"/>
-              <a:t>22/12/2021</a:t>
+              <a:t>15.12.2023</a:t>
             </a:fld>
             <a:endParaRPr lang="en-FI"/>
           </a:p>
@@ -1415,7 +1415,7 @@
           <a:p>
             <a:fld id="{984C9F39-1BBA-134C-9DFC-3F78F8A92C10}" type="datetimeFigureOut">
               <a:rPr lang="en-FI" smtClean="0"/>
-              <a:t>22/12/2021</a:t>
+              <a:t>15.12.2023</a:t>
             </a:fld>
             <a:endParaRPr lang="en-FI"/>
           </a:p>
@@ -1830,7 +1830,7 @@
           <a:p>
             <a:fld id="{984C9F39-1BBA-134C-9DFC-3F78F8A92C10}" type="datetimeFigureOut">
               <a:rPr lang="en-FI" smtClean="0"/>
-              <a:t>22/12/2021</a:t>
+              <a:t>15.12.2023</a:t>
             </a:fld>
             <a:endParaRPr lang="en-FI"/>
           </a:p>
@@ -1972,7 +1972,7 @@
           <a:p>
             <a:fld id="{984C9F39-1BBA-134C-9DFC-3F78F8A92C10}" type="datetimeFigureOut">
               <a:rPr lang="en-FI" smtClean="0"/>
-              <a:t>22/12/2021</a:t>
+              <a:t>15.12.2023</a:t>
             </a:fld>
             <a:endParaRPr lang="en-FI"/>
           </a:p>
@@ -2085,7 +2085,7 @@
           <a:p>
             <a:fld id="{984C9F39-1BBA-134C-9DFC-3F78F8A92C10}" type="datetimeFigureOut">
               <a:rPr lang="en-FI" smtClean="0"/>
-              <a:t>22/12/2021</a:t>
+              <a:t>15.12.2023</a:t>
             </a:fld>
             <a:endParaRPr lang="en-FI"/>
           </a:p>
@@ -2398,7 +2398,7 @@
           <a:p>
             <a:fld id="{984C9F39-1BBA-134C-9DFC-3F78F8A92C10}" type="datetimeFigureOut">
               <a:rPr lang="en-FI" smtClean="0"/>
-              <a:t>22/12/2021</a:t>
+              <a:t>15.12.2023</a:t>
             </a:fld>
             <a:endParaRPr lang="en-FI"/>
           </a:p>
@@ -2687,7 +2687,7 @@
           <a:p>
             <a:fld id="{984C9F39-1BBA-134C-9DFC-3F78F8A92C10}" type="datetimeFigureOut">
               <a:rPr lang="en-FI" smtClean="0"/>
-              <a:t>22/12/2021</a:t>
+              <a:t>15.12.2023</a:t>
             </a:fld>
             <a:endParaRPr lang="en-FI"/>
           </a:p>
@@ -2930,7 +2930,7 @@
           <a:p>
             <a:fld id="{984C9F39-1BBA-134C-9DFC-3F78F8A92C10}" type="datetimeFigureOut">
               <a:rPr lang="en-FI" smtClean="0"/>
-              <a:t>22/12/2021</a:t>
+              <a:t>15.12.2023</a:t>
             </a:fld>
             <a:endParaRPr lang="en-FI"/>
           </a:p>
@@ -3347,136 +3347,104 @@
           <a:chExt cx="0" cy="0"/>
         </a:xfrm>
       </p:grpSpPr>
-      <p:grpSp>
-        <p:nvGrpSpPr>
-          <p:cNvPr id="4" name="Group 3">
-            <a:extLst>
-              <a:ext uri="{FF2B5EF4-FFF2-40B4-BE49-F238E27FC236}">
-                <a16:creationId xmlns:a16="http://schemas.microsoft.com/office/drawing/2014/main" id="{B17CA1C1-9CC9-9C43-9FF8-6D8AF9073EC2}"/>
-              </a:ext>
-            </a:extLst>
-          </p:cNvPr>
-          <p:cNvGrpSpPr>
-            <a:grpSpLocks noChangeAspect="1"/>
-          </p:cNvGrpSpPr>
+      <p:sp>
+        <p:nvSpPr>
+          <p:cNvPr id="14" name="Rectangle 13">
+            <a:extLst>
+              <a:ext uri="{FF2B5EF4-FFF2-40B4-BE49-F238E27FC236}">
+                <a16:creationId xmlns:a16="http://schemas.microsoft.com/office/drawing/2014/main" id="{D90D9F93-F815-FE4E-BA86-7EE221B46FF1}"/>
+              </a:ext>
+            </a:extLst>
+          </p:cNvPr>
+          <p:cNvSpPr/>
           <p:nvPr/>
-        </p:nvGrpSpPr>
-        <p:grpSpPr>
-          <a:xfrm>
-            <a:off x="287728" y="350578"/>
-            <a:ext cx="2705652" cy="1080000"/>
-            <a:chOff x="3239273" y="3614639"/>
-            <a:chExt cx="1578297" cy="630000"/>
-          </a:xfrm>
-        </p:grpSpPr>
-        <p:pic>
-          <p:nvPicPr>
-            <p:cNvPr id="6" name="Picture 5">
-              <a:extLst>
-                <a:ext uri="{FF2B5EF4-FFF2-40B4-BE49-F238E27FC236}">
-                  <a16:creationId xmlns:a16="http://schemas.microsoft.com/office/drawing/2014/main" id="{41794167-1FB1-3041-836A-DB4717F928DB}"/>
-                </a:ext>
-              </a:extLst>
-            </p:cNvPr>
-            <p:cNvPicPr>
-              <a:picLocks noChangeAspect="1"/>
-            </p:cNvPicPr>
-            <p:nvPr/>
-          </p:nvPicPr>
-          <p:blipFill>
-            <a:blip r:embed="rId2" cstate="hqprint">
-              <a:extLst>
-                <a:ext uri="{28A0092B-C50C-407E-A947-70E740481C1C}">
-                  <a14:useLocalDpi xmlns:a14="http://schemas.microsoft.com/office/drawing/2010/main"/>
-                </a:ext>
-              </a:extLst>
-            </a:blip>
-            <a:stretch>
-              <a:fillRect/>
-            </a:stretch>
-          </p:blipFill>
-          <p:spPr>
-            <a:xfrm>
-              <a:off x="3239273" y="3614639"/>
-              <a:ext cx="630000" cy="630000"/>
-            </a:xfrm>
-            <a:prstGeom prst="rect">
-              <a:avLst/>
-            </a:prstGeom>
-          </p:spPr>
-        </p:pic>
-        <p:pic>
-          <p:nvPicPr>
-            <p:cNvPr id="7" name="Picture 6">
-              <a:extLst>
-                <a:ext uri="{FF2B5EF4-FFF2-40B4-BE49-F238E27FC236}">
-                  <a16:creationId xmlns:a16="http://schemas.microsoft.com/office/drawing/2014/main" id="{48C67FC8-9AF2-C543-A4D7-6C8DB55FC23A}"/>
-                </a:ext>
-              </a:extLst>
-            </p:cNvPr>
-            <p:cNvPicPr>
-              <a:picLocks noChangeAspect="1"/>
-            </p:cNvPicPr>
-            <p:nvPr/>
-          </p:nvPicPr>
-          <p:blipFill>
-            <a:blip r:embed="rId3" cstate="hqprint">
-              <a:extLst>
-                <a:ext uri="{28A0092B-C50C-407E-A947-70E740481C1C}">
-                  <a14:useLocalDpi xmlns:a14="http://schemas.microsoft.com/office/drawing/2010/main"/>
-                </a:ext>
-              </a:extLst>
-            </a:blip>
-            <a:stretch>
-              <a:fillRect/>
-            </a:stretch>
-          </p:blipFill>
-          <p:spPr>
-            <a:xfrm>
-              <a:off x="4026981" y="3614639"/>
-              <a:ext cx="790589" cy="630000"/>
-            </a:xfrm>
-            <a:prstGeom prst="rect">
-              <a:avLst/>
-            </a:prstGeom>
-          </p:spPr>
-        </p:pic>
-      </p:grpSp>
-      <p:pic>
-        <p:nvPicPr>
-          <p:cNvPr id="12" name="Picture 11">
-            <a:extLst>
-              <a:ext uri="{FF2B5EF4-FFF2-40B4-BE49-F238E27FC236}">
-                <a16:creationId xmlns:a16="http://schemas.microsoft.com/office/drawing/2014/main" id="{E2A47620-8D0C-814A-A203-293112B28C7F}"/>
-              </a:ext>
-            </a:extLst>
-          </p:cNvPr>
-          <p:cNvPicPr>
-            <a:picLocks noChangeAspect="1"/>
-          </p:cNvPicPr>
-          <p:nvPr/>
-        </p:nvPicPr>
-        <p:blipFill rotWithShape="1">
-          <a:blip r:embed="rId4" cstate="hqprint">
-            <a:extLst>
-              <a:ext uri="{28A0092B-C50C-407E-A947-70E740481C1C}">
-                <a14:useLocalDpi xmlns:a14="http://schemas.microsoft.com/office/drawing/2010/main"/>
-              </a:ext>
-            </a:extLst>
-          </a:blip>
-          <a:srcRect/>
-          <a:stretch/>
-        </p:blipFill>
+        </p:nvSpPr>
         <p:spPr>
           <a:xfrm>
-            <a:off x="1842283" y="1935286"/>
-            <a:ext cx="792759" cy="1076374"/>
+            <a:off x="4435472" y="1955315"/>
+            <a:ext cx="2556000" cy="2556000"/>
           </a:xfrm>
           <a:prstGeom prst="rect">
             <a:avLst/>
           </a:prstGeom>
+          <a:ln>
+            <a:noFill/>
+          </a:ln>
         </p:spPr>
-      </p:pic>
+        <p:style>
+          <a:lnRef idx="2">
+            <a:schemeClr val="dk1">
+              <a:shade val="50000"/>
+            </a:schemeClr>
+          </a:lnRef>
+          <a:fillRef idx="1">
+            <a:schemeClr val="dk1"/>
+          </a:fillRef>
+          <a:effectRef idx="0">
+            <a:schemeClr val="dk1"/>
+          </a:effectRef>
+          <a:fontRef idx="minor">
+            <a:schemeClr val="lt1"/>
+          </a:fontRef>
+        </p:style>
+        <p:txBody>
+          <a:bodyPr rtlCol="0" anchor="ctr"/>
+          <a:lstStyle/>
+          <a:p>
+            <a:pPr algn="ctr"/>
+            <a:endParaRPr lang="en-FI"/>
+          </a:p>
+        </p:txBody>
+      </p:sp>
+      <p:sp>
+        <p:nvSpPr>
+          <p:cNvPr id="2" name="Rectangle 1">
+            <a:extLst>
+              <a:ext uri="{FF2B5EF4-FFF2-40B4-BE49-F238E27FC236}">
+                <a16:creationId xmlns:a16="http://schemas.microsoft.com/office/drawing/2014/main" id="{10DC729B-34FB-9449-A977-60F11460655B}"/>
+              </a:ext>
+            </a:extLst>
+          </p:cNvPr>
+          <p:cNvSpPr/>
+          <p:nvPr/>
+        </p:nvSpPr>
+        <p:spPr>
+          <a:xfrm>
+            <a:off x="449885" y="1785915"/>
+            <a:ext cx="2843098" cy="2844000"/>
+          </a:xfrm>
+          <a:prstGeom prst="rect">
+            <a:avLst/>
+          </a:prstGeom>
+          <a:ln>
+            <a:noFill/>
+          </a:ln>
+        </p:spPr>
+        <p:style>
+          <a:lnRef idx="2">
+            <a:schemeClr val="dk1">
+              <a:shade val="50000"/>
+            </a:schemeClr>
+          </a:lnRef>
+          <a:fillRef idx="1">
+            <a:schemeClr val="dk1"/>
+          </a:fillRef>
+          <a:effectRef idx="0">
+            <a:schemeClr val="dk1"/>
+          </a:effectRef>
+          <a:fontRef idx="minor">
+            <a:schemeClr val="lt1"/>
+          </a:fontRef>
+        </p:style>
+        <p:txBody>
+          <a:bodyPr rtlCol="0" anchor="ctr"/>
+          <a:lstStyle/>
+          <a:p>
+            <a:pPr algn="ctr"/>
+            <a:endParaRPr lang="en-FI"/>
+          </a:p>
+        </p:txBody>
+      </p:sp>
       <p:pic>
         <p:nvPicPr>
           <p:cNvPr id="13" name="Picture 12">
@@ -3492,14 +3460,14 @@
           <p:nvPr/>
         </p:nvPicPr>
         <p:blipFill>
-          <a:blip r:embed="rId5"/>
+          <a:blip r:embed="rId2"/>
           <a:stretch>
             <a:fillRect/>
           </a:stretch>
         </p:blipFill>
         <p:spPr>
           <a:xfrm>
-            <a:off x="769066" y="3747034"/>
+            <a:off x="8133962" y="1989000"/>
             <a:ext cx="1546666" cy="1440000"/>
           </a:xfrm>
           <a:prstGeom prst="rect">
@@ -3509,10 +3477,10 @@
       </p:pic>
       <p:pic>
         <p:nvPicPr>
-          <p:cNvPr id="10" name="Picture 9">
-            <a:extLst>
-              <a:ext uri="{FF2B5EF4-FFF2-40B4-BE49-F238E27FC236}">
-                <a16:creationId xmlns:a16="http://schemas.microsoft.com/office/drawing/2014/main" id="{47D3BC0B-CD1A-2C4D-BD7A-AACA3452C434}"/>
+          <p:cNvPr id="5" name="Picture 4" descr="A white and black background with white circles and a black background with white lines and a black background with white circles and a black background with white lines and a black background with white lines and a black&#10;&#10;Description automatically generated">
+            <a:extLst>
+              <a:ext uri="{FF2B5EF4-FFF2-40B4-BE49-F238E27FC236}">
+                <a16:creationId xmlns:a16="http://schemas.microsoft.com/office/drawing/2014/main" id="{B39E92B1-9A0E-2C4E-BBB1-AF3E965EF485}"/>
               </a:ext>
             </a:extLst>
           </p:cNvPr>
@@ -3522,15 +3490,44 @@
           <p:nvPr/>
         </p:nvPicPr>
         <p:blipFill>
-          <a:blip r:embed="rId6"/>
+          <a:blip r:embed="rId3"/>
           <a:stretch>
             <a:fillRect/>
           </a:stretch>
         </p:blipFill>
         <p:spPr>
           <a:xfrm>
-            <a:off x="687532" y="1931660"/>
-            <a:ext cx="1139449" cy="1080000"/>
+            <a:off x="499834" y="2623715"/>
+            <a:ext cx="2743200" cy="1168400"/>
+          </a:xfrm>
+          <a:prstGeom prst="rect">
+            <a:avLst/>
+          </a:prstGeom>
+        </p:spPr>
+      </p:pic>
+      <p:pic>
+        <p:nvPicPr>
+          <p:cNvPr id="9" name="Picture 8" descr="A white puzzle pieces with a black background&#10;&#10;Description automatically generated">
+            <a:extLst>
+              <a:ext uri="{FF2B5EF4-FFF2-40B4-BE49-F238E27FC236}">
+                <a16:creationId xmlns:a16="http://schemas.microsoft.com/office/drawing/2014/main" id="{57ADD0E9-81F2-7244-AB39-CCA972F6443A}"/>
+              </a:ext>
+            </a:extLst>
+          </p:cNvPr>
+          <p:cNvPicPr>
+            <a:picLocks noChangeAspect="1"/>
+          </p:cNvPicPr>
+          <p:nvPr/>
+        </p:nvPicPr>
+        <p:blipFill rotWithShape="1">
+          <a:blip r:embed="rId4"/>
+          <a:srcRect l="4466" r="4466"/>
+          <a:stretch/>
+        </p:blipFill>
+        <p:spPr>
+          <a:xfrm>
+            <a:off x="4435472" y="2623715"/>
+            <a:ext cx="2556000" cy="1219200"/>
           </a:xfrm>
           <a:prstGeom prst="rect">
             <a:avLst/>

--- a/images/home/home.pptx
+++ b/images/home/home.pptx
@@ -261,7 +261,7 @@
           <a:p>
             <a:fld id="{984C9F39-1BBA-134C-9DFC-3F78F8A92C10}" type="datetimeFigureOut">
               <a:rPr lang="en-FI" smtClean="0"/>
-              <a:t>15.12.2023</a:t>
+              <a:t>22/12/2021</a:t>
             </a:fld>
             <a:endParaRPr lang="en-FI"/>
           </a:p>
@@ -461,7 +461,7 @@
           <a:p>
             <a:fld id="{984C9F39-1BBA-134C-9DFC-3F78F8A92C10}" type="datetimeFigureOut">
               <a:rPr lang="en-FI" smtClean="0"/>
-              <a:t>15.12.2023</a:t>
+              <a:t>22/12/2021</a:t>
             </a:fld>
             <a:endParaRPr lang="en-FI"/>
           </a:p>
@@ -671,7 +671,7 @@
           <a:p>
             <a:fld id="{984C9F39-1BBA-134C-9DFC-3F78F8A92C10}" type="datetimeFigureOut">
               <a:rPr lang="en-FI" smtClean="0"/>
-              <a:t>15.12.2023</a:t>
+              <a:t>22/12/2021</a:t>
             </a:fld>
             <a:endParaRPr lang="en-FI"/>
           </a:p>
@@ -871,7 +871,7 @@
           <a:p>
             <a:fld id="{984C9F39-1BBA-134C-9DFC-3F78F8A92C10}" type="datetimeFigureOut">
               <a:rPr lang="en-FI" smtClean="0"/>
-              <a:t>15.12.2023</a:t>
+              <a:t>22/12/2021</a:t>
             </a:fld>
             <a:endParaRPr lang="en-FI"/>
           </a:p>
@@ -1147,7 +1147,7 @@
           <a:p>
             <a:fld id="{984C9F39-1BBA-134C-9DFC-3F78F8A92C10}" type="datetimeFigureOut">
               <a:rPr lang="en-FI" smtClean="0"/>
-              <a:t>15.12.2023</a:t>
+              <a:t>22/12/2021</a:t>
             </a:fld>
             <a:endParaRPr lang="en-FI"/>
           </a:p>
@@ -1415,7 +1415,7 @@
           <a:p>
             <a:fld id="{984C9F39-1BBA-134C-9DFC-3F78F8A92C10}" type="datetimeFigureOut">
               <a:rPr lang="en-FI" smtClean="0"/>
-              <a:t>15.12.2023</a:t>
+              <a:t>22/12/2021</a:t>
             </a:fld>
             <a:endParaRPr lang="en-FI"/>
           </a:p>
@@ -1830,7 +1830,7 @@
           <a:p>
             <a:fld id="{984C9F39-1BBA-134C-9DFC-3F78F8A92C10}" type="datetimeFigureOut">
               <a:rPr lang="en-FI" smtClean="0"/>
-              <a:t>15.12.2023</a:t>
+              <a:t>22/12/2021</a:t>
             </a:fld>
             <a:endParaRPr lang="en-FI"/>
           </a:p>
@@ -1972,7 +1972,7 @@
           <a:p>
             <a:fld id="{984C9F39-1BBA-134C-9DFC-3F78F8A92C10}" type="datetimeFigureOut">
               <a:rPr lang="en-FI" smtClean="0"/>
-              <a:t>15.12.2023</a:t>
+              <a:t>22/12/2021</a:t>
             </a:fld>
             <a:endParaRPr lang="en-FI"/>
           </a:p>
@@ -2085,7 +2085,7 @@
           <a:p>
             <a:fld id="{984C9F39-1BBA-134C-9DFC-3F78F8A92C10}" type="datetimeFigureOut">
               <a:rPr lang="en-FI" smtClean="0"/>
-              <a:t>15.12.2023</a:t>
+              <a:t>22/12/2021</a:t>
             </a:fld>
             <a:endParaRPr lang="en-FI"/>
           </a:p>
@@ -2398,7 +2398,7 @@
           <a:p>
             <a:fld id="{984C9F39-1BBA-134C-9DFC-3F78F8A92C10}" type="datetimeFigureOut">
               <a:rPr lang="en-FI" smtClean="0"/>
-              <a:t>15.12.2023</a:t>
+              <a:t>22/12/2021</a:t>
             </a:fld>
             <a:endParaRPr lang="en-FI"/>
           </a:p>
@@ -2687,7 +2687,7 @@
           <a:p>
             <a:fld id="{984C9F39-1BBA-134C-9DFC-3F78F8A92C10}" type="datetimeFigureOut">
               <a:rPr lang="en-FI" smtClean="0"/>
-              <a:t>15.12.2023</a:t>
+              <a:t>22/12/2021</a:t>
             </a:fld>
             <a:endParaRPr lang="en-FI"/>
           </a:p>
@@ -2930,7 +2930,7 @@
           <a:p>
             <a:fld id="{984C9F39-1BBA-134C-9DFC-3F78F8A92C10}" type="datetimeFigureOut">
               <a:rPr lang="en-FI" smtClean="0"/>
-              <a:t>15.12.2023</a:t>
+              <a:t>22/12/2021</a:t>
             </a:fld>
             <a:endParaRPr lang="en-FI"/>
           </a:p>
@@ -3347,104 +3347,136 @@
           <a:chExt cx="0" cy="0"/>
         </a:xfrm>
       </p:grpSpPr>
-      <p:sp>
-        <p:nvSpPr>
-          <p:cNvPr id="14" name="Rectangle 13">
-            <a:extLst>
-              <a:ext uri="{FF2B5EF4-FFF2-40B4-BE49-F238E27FC236}">
-                <a16:creationId xmlns:a16="http://schemas.microsoft.com/office/drawing/2014/main" id="{D90D9F93-F815-FE4E-BA86-7EE221B46FF1}"/>
-              </a:ext>
-            </a:extLst>
-          </p:cNvPr>
-          <p:cNvSpPr/>
+      <p:grpSp>
+        <p:nvGrpSpPr>
+          <p:cNvPr id="4" name="Group 3">
+            <a:extLst>
+              <a:ext uri="{FF2B5EF4-FFF2-40B4-BE49-F238E27FC236}">
+                <a16:creationId xmlns:a16="http://schemas.microsoft.com/office/drawing/2014/main" id="{B17CA1C1-9CC9-9C43-9FF8-6D8AF9073EC2}"/>
+              </a:ext>
+            </a:extLst>
+          </p:cNvPr>
+          <p:cNvGrpSpPr>
+            <a:grpSpLocks noChangeAspect="1"/>
+          </p:cNvGrpSpPr>
           <p:nvPr/>
-        </p:nvSpPr>
+        </p:nvGrpSpPr>
+        <p:grpSpPr>
+          <a:xfrm>
+            <a:off x="287728" y="350578"/>
+            <a:ext cx="2705652" cy="1080000"/>
+            <a:chOff x="3239273" y="3614639"/>
+            <a:chExt cx="1578297" cy="630000"/>
+          </a:xfrm>
+        </p:grpSpPr>
+        <p:pic>
+          <p:nvPicPr>
+            <p:cNvPr id="6" name="Picture 5">
+              <a:extLst>
+                <a:ext uri="{FF2B5EF4-FFF2-40B4-BE49-F238E27FC236}">
+                  <a16:creationId xmlns:a16="http://schemas.microsoft.com/office/drawing/2014/main" id="{41794167-1FB1-3041-836A-DB4717F928DB}"/>
+                </a:ext>
+              </a:extLst>
+            </p:cNvPr>
+            <p:cNvPicPr>
+              <a:picLocks noChangeAspect="1"/>
+            </p:cNvPicPr>
+            <p:nvPr/>
+          </p:nvPicPr>
+          <p:blipFill>
+            <a:blip r:embed="rId2" cstate="hqprint">
+              <a:extLst>
+                <a:ext uri="{28A0092B-C50C-407E-A947-70E740481C1C}">
+                  <a14:useLocalDpi xmlns:a14="http://schemas.microsoft.com/office/drawing/2010/main"/>
+                </a:ext>
+              </a:extLst>
+            </a:blip>
+            <a:stretch>
+              <a:fillRect/>
+            </a:stretch>
+          </p:blipFill>
+          <p:spPr>
+            <a:xfrm>
+              <a:off x="3239273" y="3614639"/>
+              <a:ext cx="630000" cy="630000"/>
+            </a:xfrm>
+            <a:prstGeom prst="rect">
+              <a:avLst/>
+            </a:prstGeom>
+          </p:spPr>
+        </p:pic>
+        <p:pic>
+          <p:nvPicPr>
+            <p:cNvPr id="7" name="Picture 6">
+              <a:extLst>
+                <a:ext uri="{FF2B5EF4-FFF2-40B4-BE49-F238E27FC236}">
+                  <a16:creationId xmlns:a16="http://schemas.microsoft.com/office/drawing/2014/main" id="{48C67FC8-9AF2-C543-A4D7-6C8DB55FC23A}"/>
+                </a:ext>
+              </a:extLst>
+            </p:cNvPr>
+            <p:cNvPicPr>
+              <a:picLocks noChangeAspect="1"/>
+            </p:cNvPicPr>
+            <p:nvPr/>
+          </p:nvPicPr>
+          <p:blipFill>
+            <a:blip r:embed="rId3" cstate="hqprint">
+              <a:extLst>
+                <a:ext uri="{28A0092B-C50C-407E-A947-70E740481C1C}">
+                  <a14:useLocalDpi xmlns:a14="http://schemas.microsoft.com/office/drawing/2010/main"/>
+                </a:ext>
+              </a:extLst>
+            </a:blip>
+            <a:stretch>
+              <a:fillRect/>
+            </a:stretch>
+          </p:blipFill>
+          <p:spPr>
+            <a:xfrm>
+              <a:off x="4026981" y="3614639"/>
+              <a:ext cx="790589" cy="630000"/>
+            </a:xfrm>
+            <a:prstGeom prst="rect">
+              <a:avLst/>
+            </a:prstGeom>
+          </p:spPr>
+        </p:pic>
+      </p:grpSp>
+      <p:pic>
+        <p:nvPicPr>
+          <p:cNvPr id="12" name="Picture 11">
+            <a:extLst>
+              <a:ext uri="{FF2B5EF4-FFF2-40B4-BE49-F238E27FC236}">
+                <a16:creationId xmlns:a16="http://schemas.microsoft.com/office/drawing/2014/main" id="{E2A47620-8D0C-814A-A203-293112B28C7F}"/>
+              </a:ext>
+            </a:extLst>
+          </p:cNvPr>
+          <p:cNvPicPr>
+            <a:picLocks noChangeAspect="1"/>
+          </p:cNvPicPr>
+          <p:nvPr/>
+        </p:nvPicPr>
+        <p:blipFill rotWithShape="1">
+          <a:blip r:embed="rId4" cstate="hqprint">
+            <a:extLst>
+              <a:ext uri="{28A0092B-C50C-407E-A947-70E740481C1C}">
+                <a14:useLocalDpi xmlns:a14="http://schemas.microsoft.com/office/drawing/2010/main"/>
+              </a:ext>
+            </a:extLst>
+          </a:blip>
+          <a:srcRect/>
+          <a:stretch/>
+        </p:blipFill>
         <p:spPr>
           <a:xfrm>
-            <a:off x="4435472" y="1955315"/>
-            <a:ext cx="2556000" cy="2556000"/>
+            <a:off x="1842283" y="1935286"/>
+            <a:ext cx="792759" cy="1076374"/>
           </a:xfrm>
           <a:prstGeom prst="rect">
             <a:avLst/>
           </a:prstGeom>
-          <a:ln>
-            <a:noFill/>
-          </a:ln>
         </p:spPr>
-        <p:style>
-          <a:lnRef idx="2">
-            <a:schemeClr val="dk1">
-              <a:shade val="50000"/>
-            </a:schemeClr>
-          </a:lnRef>
-          <a:fillRef idx="1">
-            <a:schemeClr val="dk1"/>
-          </a:fillRef>
-          <a:effectRef idx="0">
-            <a:schemeClr val="dk1"/>
-          </a:effectRef>
-          <a:fontRef idx="minor">
-            <a:schemeClr val="lt1"/>
-          </a:fontRef>
-        </p:style>
-        <p:txBody>
-          <a:bodyPr rtlCol="0" anchor="ctr"/>
-          <a:lstStyle/>
-          <a:p>
-            <a:pPr algn="ctr"/>
-            <a:endParaRPr lang="en-FI"/>
-          </a:p>
-        </p:txBody>
-      </p:sp>
-      <p:sp>
-        <p:nvSpPr>
-          <p:cNvPr id="2" name="Rectangle 1">
-            <a:extLst>
-              <a:ext uri="{FF2B5EF4-FFF2-40B4-BE49-F238E27FC236}">
-                <a16:creationId xmlns:a16="http://schemas.microsoft.com/office/drawing/2014/main" id="{10DC729B-34FB-9449-A977-60F11460655B}"/>
-              </a:ext>
-            </a:extLst>
-          </p:cNvPr>
-          <p:cNvSpPr/>
-          <p:nvPr/>
-        </p:nvSpPr>
-        <p:spPr>
-          <a:xfrm>
-            <a:off x="449885" y="1785915"/>
-            <a:ext cx="2843098" cy="2844000"/>
-          </a:xfrm>
-          <a:prstGeom prst="rect">
-            <a:avLst/>
-          </a:prstGeom>
-          <a:ln>
-            <a:noFill/>
-          </a:ln>
-        </p:spPr>
-        <p:style>
-          <a:lnRef idx="2">
-            <a:schemeClr val="dk1">
-              <a:shade val="50000"/>
-            </a:schemeClr>
-          </a:lnRef>
-          <a:fillRef idx="1">
-            <a:schemeClr val="dk1"/>
-          </a:fillRef>
-          <a:effectRef idx="0">
-            <a:schemeClr val="dk1"/>
-          </a:effectRef>
-          <a:fontRef idx="minor">
-            <a:schemeClr val="lt1"/>
-          </a:fontRef>
-        </p:style>
-        <p:txBody>
-          <a:bodyPr rtlCol="0" anchor="ctr"/>
-          <a:lstStyle/>
-          <a:p>
-            <a:pPr algn="ctr"/>
-            <a:endParaRPr lang="en-FI"/>
-          </a:p>
-        </p:txBody>
-      </p:sp>
+      </p:pic>
       <p:pic>
         <p:nvPicPr>
           <p:cNvPr id="13" name="Picture 12">
@@ -3460,14 +3492,14 @@
           <p:nvPr/>
         </p:nvPicPr>
         <p:blipFill>
-          <a:blip r:embed="rId2"/>
+          <a:blip r:embed="rId5"/>
           <a:stretch>
             <a:fillRect/>
           </a:stretch>
         </p:blipFill>
         <p:spPr>
           <a:xfrm>
-            <a:off x="8133962" y="1989000"/>
+            <a:off x="769066" y="3747034"/>
             <a:ext cx="1546666" cy="1440000"/>
           </a:xfrm>
           <a:prstGeom prst="rect">
@@ -3477,10 +3509,10 @@
       </p:pic>
       <p:pic>
         <p:nvPicPr>
-          <p:cNvPr id="5" name="Picture 4" descr="A white and black background with white circles and a black background with white lines and a black background with white circles and a black background with white lines and a black background with white lines and a black&#10;&#10;Description automatically generated">
-            <a:extLst>
-              <a:ext uri="{FF2B5EF4-FFF2-40B4-BE49-F238E27FC236}">
-                <a16:creationId xmlns:a16="http://schemas.microsoft.com/office/drawing/2014/main" id="{B39E92B1-9A0E-2C4E-BBB1-AF3E965EF485}"/>
+          <p:cNvPr id="10" name="Picture 9">
+            <a:extLst>
+              <a:ext uri="{FF2B5EF4-FFF2-40B4-BE49-F238E27FC236}">
+                <a16:creationId xmlns:a16="http://schemas.microsoft.com/office/drawing/2014/main" id="{47D3BC0B-CD1A-2C4D-BD7A-AACA3452C434}"/>
               </a:ext>
             </a:extLst>
           </p:cNvPr>
@@ -3490,44 +3522,15 @@
           <p:nvPr/>
         </p:nvPicPr>
         <p:blipFill>
-          <a:blip r:embed="rId3"/>
+          <a:blip r:embed="rId6"/>
           <a:stretch>
             <a:fillRect/>
           </a:stretch>
         </p:blipFill>
         <p:spPr>
           <a:xfrm>
-            <a:off x="499834" y="2623715"/>
-            <a:ext cx="2743200" cy="1168400"/>
-          </a:xfrm>
-          <a:prstGeom prst="rect">
-            <a:avLst/>
-          </a:prstGeom>
-        </p:spPr>
-      </p:pic>
-      <p:pic>
-        <p:nvPicPr>
-          <p:cNvPr id="9" name="Picture 8" descr="A white puzzle pieces with a black background&#10;&#10;Description automatically generated">
-            <a:extLst>
-              <a:ext uri="{FF2B5EF4-FFF2-40B4-BE49-F238E27FC236}">
-                <a16:creationId xmlns:a16="http://schemas.microsoft.com/office/drawing/2014/main" id="{57ADD0E9-81F2-7244-AB39-CCA972F6443A}"/>
-              </a:ext>
-            </a:extLst>
-          </p:cNvPr>
-          <p:cNvPicPr>
-            <a:picLocks noChangeAspect="1"/>
-          </p:cNvPicPr>
-          <p:nvPr/>
-        </p:nvPicPr>
-        <p:blipFill rotWithShape="1">
-          <a:blip r:embed="rId4"/>
-          <a:srcRect l="4466" r="4466"/>
-          <a:stretch/>
-        </p:blipFill>
-        <p:spPr>
-          <a:xfrm>
-            <a:off x="4435472" y="2623715"/>
-            <a:ext cx="2556000" cy="1219200"/>
+            <a:off x="687532" y="1931660"/>
+            <a:ext cx="1139449" cy="1080000"/>
           </a:xfrm>
           <a:prstGeom prst="rect">
             <a:avLst/>
